--- a/rocnikova_prace.pptx
+++ b/rocnikova_prace.pptx
@@ -3721,73 +3721,27 @@
           <a:bodyPr/>
           <a:lstStyle/>
           <a:p>
-            <a:pPr marL="514350" indent="-514350">
-              <a:buFont typeface="+mj-lt"/>
-              <a:buAutoNum type="arabicPeriod"/>
-            </a:pPr>
             <a:r>
               <a:rPr lang="cs-CZ" dirty="0"/>
-              <a:t>Káva </a:t>
-            </a:r>
-          </a:p>
-          <a:p>
-            <a:pPr marL="514350" indent="-514350">
-              <a:buFont typeface="+mj-lt"/>
-              <a:buAutoNum type="arabicPeriod"/>
-            </a:pPr>
+              <a:t>Bar </a:t>
+            </a:r>
+          </a:p>
+          <a:p>
             <a:r>
               <a:rPr lang="cs-CZ" dirty="0"/>
-              <a:t>Barman</a:t>
-            </a:r>
-          </a:p>
-          <a:p>
-            <a:pPr marL="514350" indent="-514350">
-              <a:buFont typeface="+mj-lt"/>
-              <a:buAutoNum type="arabicPeriod"/>
-            </a:pPr>
+              <a:t>Policejní stanice</a:t>
+            </a:r>
+          </a:p>
+          <a:p>
             <a:r>
               <a:rPr lang="cs-CZ" dirty="0"/>
-              <a:t>Bohuš</a:t>
-            </a:r>
-          </a:p>
-          <a:p>
-            <a:pPr marL="514350" indent="-514350">
-              <a:buFont typeface="+mj-lt"/>
-              <a:buAutoNum type="arabicPeriod"/>
-            </a:pPr>
+              <a:t>Ulice</a:t>
+            </a:r>
+          </a:p>
+          <a:p>
             <a:r>
               <a:rPr lang="cs-CZ" dirty="0"/>
-              <a:t>Barman → Pivo</a:t>
-            </a:r>
-          </a:p>
-          <a:p>
-            <a:pPr marL="514350" indent="-514350">
-              <a:buFont typeface="+mj-lt"/>
-              <a:buAutoNum type="arabicPeriod"/>
-            </a:pPr>
-            <a:r>
-              <a:rPr lang="cs-CZ" dirty="0"/>
-              <a:t>Bohuš → Heslo</a:t>
-            </a:r>
-          </a:p>
-          <a:p>
-            <a:pPr marL="514350" indent="-514350">
-              <a:buFont typeface="+mj-lt"/>
-              <a:buAutoNum type="arabicPeriod"/>
-            </a:pPr>
-            <a:r>
-              <a:rPr lang="cs-CZ" dirty="0"/>
-              <a:t>Branka</a:t>
-            </a:r>
-          </a:p>
-          <a:p>
-            <a:pPr marL="514350" indent="-514350">
-              <a:buFont typeface="+mj-lt"/>
-              <a:buAutoNum type="arabicPeriod"/>
-            </a:pPr>
-            <a:r>
-              <a:rPr lang="cs-CZ" dirty="0"/>
-              <a:t>Kočka</a:t>
+              <a:t>Ulička</a:t>
             </a:r>
           </a:p>
         </p:txBody>
